--- a/STATE_OF_THE_SHOW.pptx
+++ b/STATE_OF_THE_SHOW.pptx
@@ -3314,7 +3314,7 @@
                 </a:solidFill>
                 <a:latin typeface="Helvetica Neue"/>
               </a:rPr>
-              <a:t>Since Jun 8, 2026 · through 2026-09-04</a:t>
+              <a:t>Since Jun 8, 2026 · through 2026-09-07</a:t>
             </a:r>
           </a:p>
         </p:txBody>
@@ -3581,7 +3581,7 @@
                 </a:solidFill>
                 <a:latin typeface="Georgia"/>
               </a:rPr>
-              <a:t>515,772</a:t>
+              <a:t>516,312</a:t>
             </a:r>
           </a:p>
         </p:txBody>
@@ -3894,7 +3894,7 @@
                 </a:solidFill>
                 <a:latin typeface="Georgia"/>
               </a:rPr>
-              <a:t>16,505</a:t>
+              <a:t>16,524</a:t>
             </a:r>
           </a:p>
         </p:txBody>
@@ -4050,7 +4050,7 @@
                 </a:solidFill>
                 <a:latin typeface="Georgia"/>
               </a:rPr>
-              <a:t>928</a:t>
+              <a:t>929</a:t>
             </a:r>
           </a:p>
         </p:txBody>
@@ -4206,7 +4206,7 @@
                 </a:solidFill>
                 <a:latin typeface="Georgia"/>
               </a:rPr>
-              <a:t>1,185</a:t>
+              <a:t>1,186</a:t>
             </a:r>
           </a:p>
         </p:txBody>
@@ -4594,7 +4594,7 @@
                 </a:solidFill>
                 <a:latin typeface="Georgia"/>
               </a:rPr>
-              <a:t>220,309 views</a:t>
+              <a:t>220,313 views</a:t>
             </a:r>
           </a:p>
         </p:txBody>
@@ -4964,7 +4964,7 @@
                 </a:solidFill>
                 <a:latin typeface="Georgia"/>
               </a:rPr>
-              <a:t>207,767 views</a:t>
+              <a:t>207,768 views</a:t>
             </a:r>
           </a:p>
         </p:txBody>
@@ -5334,7 +5334,7 @@
                 </a:solidFill>
                 <a:latin typeface="Georgia"/>
               </a:rPr>
-              <a:t>87,696 views</a:t>
+              <a:t>88,231 views</a:t>
             </a:r>
           </a:p>
         </p:txBody>
@@ -5368,7 +5368,7 @@
                 </a:solidFill>
                 <a:latin typeface="Helvetica Neue"/>
               </a:rPr>
-              <a:t>141 posts · 621 avg / post</a:t>
+              <a:t>141 posts · 625 avg / post</a:t>
             </a:r>
           </a:p>
         </p:txBody>
@@ -8254,7 +8254,7 @@
                 </a:solidFill>
                 <a:latin typeface="Georgia"/>
               </a:rPr>
-              <a:t>92,787 views</a:t>
+              <a:t>92,798 views</a:t>
             </a:r>
           </a:p>
         </p:txBody>
@@ -8492,7 +8492,7 @@
                 </a:solidFill>
                 <a:latin typeface="Helvetica Neue"/>
               </a:rPr>
-              <a:t>16 posts · 18,209 views</a:t>
+              <a:t>16 posts · 18,220 views</a:t>
             </a:r>
           </a:p>
         </p:txBody>
@@ -9042,7 +9042,7 @@
                 </a:solidFill>
                 <a:latin typeface="Georgia"/>
               </a:rPr>
-              <a:t>17,937 views</a:t>
+              <a:t>18,195 views</a:t>
             </a:r>
           </a:p>
         </p:txBody>
@@ -9076,7 +9076,7 @@
                 </a:solidFill>
                 <a:latin typeface="Helvetica Neue"/>
               </a:rPr>
-              <a:t>46 posts · 389 avg / post</a:t>
+              <a:t>46 posts · 395 avg / post</a:t>
             </a:r>
           </a:p>
         </p:txBody>
@@ -9144,7 +9144,7 @@
                 </a:solidFill>
                 <a:latin typeface="Helvetica Neue"/>
               </a:rPr>
-              <a:t>1 posts · 140 views</a:t>
+              <a:t>1 posts · 143 views</a:t>
             </a:r>
           </a:p>
         </p:txBody>
@@ -9280,7 +9280,7 @@
                 </a:solidFill>
                 <a:latin typeface="Helvetica Neue"/>
               </a:rPr>
-              <a:t>22 posts · 10,816 views</a:t>
+              <a:t>22 posts · 11,071 views</a:t>
             </a:r>
           </a:p>
         </p:txBody>
@@ -9436,7 +9436,7 @@
                 </a:solidFill>
                 <a:latin typeface="Georgia"/>
               </a:rPr>
-              <a:t>17,200 views</a:t>
+              <a:t>17,206 views</a:t>
             </a:r>
           </a:p>
         </p:txBody>
@@ -9674,7 +9674,7 @@
                 </a:solidFill>
                 <a:latin typeface="Helvetica Neue"/>
               </a:rPr>
-              <a:t>3 posts · 184 views</a:t>
+              <a:t>3 posts · 190 views</a:t>
             </a:r>
           </a:p>
         </p:txBody>
@@ -9830,7 +9830,7 @@
                 </a:solidFill>
                 <a:latin typeface="Georgia"/>
               </a:rPr>
-              <a:t>9,174 views</a:t>
+              <a:t>9,195 views</a:t>
             </a:r>
           </a:p>
         </p:txBody>
@@ -9864,7 +9864,7 @@
                 </a:solidFill>
                 <a:latin typeface="Helvetica Neue"/>
               </a:rPr>
-              <a:t>10 posts · 917 avg / post</a:t>
+              <a:t>10 posts · 919 avg / post</a:t>
             </a:r>
           </a:p>
         </p:txBody>
@@ -10068,7 +10068,7 @@
                 </a:solidFill>
                 <a:latin typeface="Helvetica Neue"/>
               </a:rPr>
-              <a:t>5 posts · 3,042 views</a:t>
+              <a:t>5 posts · 3,063 views</a:t>
             </a:r>
           </a:p>
         </p:txBody>
@@ -10224,7 +10224,7 @@
                 </a:solidFill>
                 <a:latin typeface="Georgia"/>
               </a:rPr>
-              <a:t>8,221 views</a:t>
+              <a:t>8,232 views</a:t>
             </a:r>
           </a:p>
         </p:txBody>
@@ -10258,7 +10258,7 @@
                 </a:solidFill>
                 <a:latin typeface="Helvetica Neue"/>
               </a:rPr>
-              <a:t>8 posts · 1,027 avg / post</a:t>
+              <a:t>8 posts · 1,029 avg / post</a:t>
             </a:r>
           </a:p>
         </p:txBody>
@@ -10462,7 +10462,7 @@
                 </a:solidFill>
                 <a:latin typeface="Helvetica Neue"/>
               </a:rPr>
-              <a:t>2 posts · 831 views</a:t>
+              <a:t>2 posts · 842 views</a:t>
             </a:r>
           </a:p>
         </p:txBody>
@@ -10816,7 +10816,7 @@
                 </a:solidFill>
                 <a:latin typeface="Georgia"/>
               </a:rPr>
-              <a:t>228,543</a:t>
+              <a:t>228,775</a:t>
             </a:r>
           </a:p>
         </p:txBody>
@@ -10884,7 +10884,7 @@
                 </a:solidFill>
                 <a:latin typeface="Helvetica Neue"/>
               </a:rPr>
-              <a:t>1,771 avg / post</a:t>
+              <a:t>1,773 avg / post</a:t>
             </a:r>
           </a:p>
         </p:txBody>
@@ -11074,7 +11074,7 @@
                 </a:solidFill>
                 <a:latin typeface="Georgia"/>
               </a:rPr>
-              <a:t>147,078</a:t>
+              <a:t>147,307</a:t>
             </a:r>
           </a:p>
         </p:txBody>
@@ -11142,7 +11142,7 @@
                 </a:solidFill>
                 <a:latin typeface="Helvetica Neue"/>
               </a:rPr>
-              <a:t>1,050 avg / post</a:t>
+              <a:t>1,052 avg / post</a:t>
             </a:r>
           </a:p>
         </p:txBody>
@@ -11332,7 +11332,7 @@
                 </a:solidFill>
                 <a:latin typeface="Georgia"/>
               </a:rPr>
-              <a:t>138,745</a:t>
+              <a:t>138,800</a:t>
             </a:r>
           </a:p>
         </p:txBody>
@@ -11400,7 +11400,7 @@
                 </a:solidFill>
                 <a:latin typeface="Helvetica Neue"/>
               </a:rPr>
-              <a:t>906 avg / post</a:t>
+              <a:t>907 avg / post</a:t>
             </a:r>
           </a:p>
         </p:txBody>
@@ -11590,7 +11590,7 @@
                 </a:solidFill>
                 <a:latin typeface="Georgia"/>
               </a:rPr>
-              <a:t>1,406</a:t>
+              <a:t>1,430</a:t>
             </a:r>
           </a:p>
         </p:txBody>
@@ -11658,7 +11658,7 @@
                 </a:solidFill>
                 <a:latin typeface="Helvetica Neue"/>
               </a:rPr>
-              <a:t>108 avg / post</a:t>
+              <a:t>110 avg / post</a:t>
             </a:r>
           </a:p>
         </p:txBody>

--- a/STATE_OF_THE_SHOW.pptx
+++ b/STATE_OF_THE_SHOW.pptx
@@ -3314,7 +3314,7 @@
                 </a:solidFill>
                 <a:latin typeface="Helvetica Neue"/>
               </a:rPr>
-              <a:t>Since Jun 8, 2026 · through 2026-09-07</a:t>
+              <a:t>Since Jun 8, 2026 · through 2026-09-09</a:t>
             </a:r>
           </a:p>
         </p:txBody>
@@ -3581,7 +3581,7 @@
                 </a:solidFill>
                 <a:latin typeface="Georgia"/>
               </a:rPr>
-              <a:t>516,312</a:t>
+              <a:t>516,605</a:t>
             </a:r>
           </a:p>
         </p:txBody>
@@ -3894,7 +3894,7 @@
                 </a:solidFill>
                 <a:latin typeface="Georgia"/>
               </a:rPr>
-              <a:t>16,524</a:t>
+              <a:t>16,543</a:t>
             </a:r>
           </a:p>
         </p:txBody>
@@ -4050,7 +4050,7 @@
                 </a:solidFill>
                 <a:latin typeface="Georgia"/>
               </a:rPr>
-              <a:t>929</a:t>
+              <a:t>930</a:t>
             </a:r>
           </a:p>
         </p:txBody>
@@ -4206,7 +4206,7 @@
                 </a:solidFill>
                 <a:latin typeface="Georgia"/>
               </a:rPr>
-              <a:t>1,186</a:t>
+              <a:t>1,187</a:t>
             </a:r>
           </a:p>
         </p:txBody>
@@ -4594,7 +4594,7 @@
                 </a:solidFill>
                 <a:latin typeface="Georgia"/>
               </a:rPr>
-              <a:t>220,313 views</a:t>
+              <a:t>220,317 views</a:t>
             </a:r>
           </a:p>
         </p:txBody>
@@ -5334,7 +5334,7 @@
                 </a:solidFill>
                 <a:latin typeface="Georgia"/>
               </a:rPr>
-              <a:t>88,231 views</a:t>
+              <a:t>88,520 views</a:t>
             </a:r>
           </a:p>
         </p:txBody>
@@ -5368,7 +5368,7 @@
                 </a:solidFill>
                 <a:latin typeface="Helvetica Neue"/>
               </a:rPr>
-              <a:t>141 posts · 625 avg / post</a:t>
+              <a:t>141 posts · 627 avg / post</a:t>
             </a:r>
           </a:p>
         </p:txBody>
@@ -9042,7 +9042,7 @@
                 </a:solidFill>
                 <a:latin typeface="Georgia"/>
               </a:rPr>
-              <a:t>18,195 views</a:t>
+              <a:t>18,305 views</a:t>
             </a:r>
           </a:p>
         </p:txBody>
@@ -9076,7 +9076,7 @@
                 </a:solidFill>
                 <a:latin typeface="Helvetica Neue"/>
               </a:rPr>
-              <a:t>46 posts · 395 avg / post</a:t>
+              <a:t>46 posts · 397 avg / post</a:t>
             </a:r>
           </a:p>
         </p:txBody>
@@ -9144,7 +9144,7 @@
                 </a:solidFill>
                 <a:latin typeface="Helvetica Neue"/>
               </a:rPr>
-              <a:t>1 posts · 143 views</a:t>
+              <a:t>1 posts · 146 views</a:t>
             </a:r>
           </a:p>
         </p:txBody>
@@ -9280,7 +9280,7 @@
                 </a:solidFill>
                 <a:latin typeface="Helvetica Neue"/>
               </a:rPr>
-              <a:t>22 posts · 11,071 views</a:t>
+              <a:t>22 posts · 11,178 views</a:t>
             </a:r>
           </a:p>
         </p:txBody>
@@ -9436,7 +9436,7 @@
                 </a:solidFill>
                 <a:latin typeface="Georgia"/>
               </a:rPr>
-              <a:t>17,206 views</a:t>
+              <a:t>17,210 views</a:t>
             </a:r>
           </a:p>
         </p:txBody>
@@ -9674,7 +9674,7 @@
                 </a:solidFill>
                 <a:latin typeface="Helvetica Neue"/>
               </a:rPr>
-              <a:t>3 posts · 190 views</a:t>
+              <a:t>3 posts · 194 views</a:t>
             </a:r>
           </a:p>
         </p:txBody>
@@ -9830,7 +9830,7 @@
                 </a:solidFill>
                 <a:latin typeface="Georgia"/>
               </a:rPr>
-              <a:t>9,195 views</a:t>
+              <a:t>9,198 views</a:t>
             </a:r>
           </a:p>
         </p:txBody>
@@ -10068,7 +10068,7 @@
                 </a:solidFill>
                 <a:latin typeface="Helvetica Neue"/>
               </a:rPr>
-              <a:t>5 posts · 3,063 views</a:t>
+              <a:t>5 posts · 3,066 views</a:t>
             </a:r>
           </a:p>
         </p:txBody>
@@ -10224,7 +10224,7 @@
                 </a:solidFill>
                 <a:latin typeface="Georgia"/>
               </a:rPr>
-              <a:t>8,232 views</a:t>
+              <a:t>8,235 views</a:t>
             </a:r>
           </a:p>
         </p:txBody>
@@ -10462,7 +10462,7 @@
                 </a:solidFill>
                 <a:latin typeface="Helvetica Neue"/>
               </a:rPr>
-              <a:t>2 posts · 842 views</a:t>
+              <a:t>2 posts · 845 views</a:t>
             </a:r>
           </a:p>
         </p:txBody>
@@ -10816,7 +10816,7 @@
                 </a:solidFill>
                 <a:latin typeface="Georgia"/>
               </a:rPr>
-              <a:t>228,775</a:t>
+              <a:t>228,907</a:t>
             </a:r>
           </a:p>
         </p:txBody>
@@ -10884,7 +10884,7 @@
                 </a:solidFill>
                 <a:latin typeface="Helvetica Neue"/>
               </a:rPr>
-              <a:t>1,773 avg / post</a:t>
+              <a:t>1,774 avg / post</a:t>
             </a:r>
           </a:p>
         </p:txBody>
@@ -11074,7 +11074,7 @@
                 </a:solidFill>
                 <a:latin typeface="Georgia"/>
               </a:rPr>
-              <a:t>147,307</a:t>
+              <a:t>147,429</a:t>
             </a:r>
           </a:p>
         </p:txBody>
@@ -11142,7 +11142,7 @@
                 </a:solidFill>
                 <a:latin typeface="Helvetica Neue"/>
               </a:rPr>
-              <a:t>1,052 avg / post</a:t>
+              <a:t>1,053 avg / post</a:t>
             </a:r>
           </a:p>
         </p:txBody>
@@ -11332,7 +11332,7 @@
                 </a:solidFill>
                 <a:latin typeface="Georgia"/>
               </a:rPr>
-              <a:t>138,800</a:t>
+              <a:t>138,828</a:t>
             </a:r>
           </a:p>
         </p:txBody>
@@ -11590,7 +11590,7 @@
                 </a:solidFill>
                 <a:latin typeface="Georgia"/>
               </a:rPr>
-              <a:t>1,430</a:t>
+              <a:t>1,441</a:t>
             </a:r>
           </a:p>
         </p:txBody>

--- a/STATE_OF_THE_SHOW.pptx
+++ b/STATE_OF_THE_SHOW.pptx
@@ -3314,7 +3314,7 @@
                 </a:solidFill>
                 <a:latin typeface="Helvetica Neue"/>
               </a:rPr>
-              <a:t>Since Jun 8, 2026 · through 2026-09-09</a:t>
+              <a:t>Since Jun 8, 2026 · through 2026-09-11</a:t>
             </a:r>
           </a:p>
         </p:txBody>
@@ -3581,7 +3581,7 @@
                 </a:solidFill>
                 <a:latin typeface="Georgia"/>
               </a:rPr>
-              <a:t>516,605</a:t>
+              <a:t>516,785</a:t>
             </a:r>
           </a:p>
         </p:txBody>
@@ -3894,7 +3894,7 @@
                 </a:solidFill>
                 <a:latin typeface="Georgia"/>
               </a:rPr>
-              <a:t>16,543</a:t>
+              <a:t>16,555</a:t>
             </a:r>
           </a:p>
         </p:txBody>
@@ -4050,7 +4050,7 @@
                 </a:solidFill>
                 <a:latin typeface="Georgia"/>
               </a:rPr>
-              <a:t>930</a:t>
+              <a:t>927</a:t>
             </a:r>
           </a:p>
         </p:txBody>
@@ -4206,7 +4206,7 @@
                 </a:solidFill>
                 <a:latin typeface="Georgia"/>
               </a:rPr>
-              <a:t>1,187</a:t>
+              <a:t>1,188</a:t>
             </a:r>
           </a:p>
         </p:txBody>
@@ -4594,7 +4594,7 @@
                 </a:solidFill>
                 <a:latin typeface="Georgia"/>
               </a:rPr>
-              <a:t>220,317 views</a:t>
+              <a:t>220,319 views</a:t>
             </a:r>
           </a:p>
         </p:txBody>
@@ -5334,7 +5334,7 @@
                 </a:solidFill>
                 <a:latin typeface="Georgia"/>
               </a:rPr>
-              <a:t>88,520 views</a:t>
+              <a:t>88,698 views</a:t>
             </a:r>
           </a:p>
         </p:txBody>
@@ -5368,7 +5368,7 @@
                 </a:solidFill>
                 <a:latin typeface="Helvetica Neue"/>
               </a:rPr>
-              <a:t>141 posts · 627 avg / post</a:t>
+              <a:t>141 posts · 629 avg / post</a:t>
             </a:r>
           </a:p>
         </p:txBody>
@@ -9042,7 +9042,7 @@
                 </a:solidFill>
                 <a:latin typeface="Georgia"/>
               </a:rPr>
-              <a:t>18,305 views</a:t>
+              <a:t>18,374 views</a:t>
             </a:r>
           </a:p>
         </p:txBody>
@@ -9076,7 +9076,7 @@
                 </a:solidFill>
                 <a:latin typeface="Helvetica Neue"/>
               </a:rPr>
-              <a:t>46 posts · 397 avg / post</a:t>
+              <a:t>46 posts · 399 avg / post</a:t>
             </a:r>
           </a:p>
         </p:txBody>
@@ -9144,7 +9144,7 @@
                 </a:solidFill>
                 <a:latin typeface="Helvetica Neue"/>
               </a:rPr>
-              <a:t>1 posts · 146 views</a:t>
+              <a:t>1 posts · 147 views</a:t>
             </a:r>
           </a:p>
         </p:txBody>
@@ -9280,7 +9280,7 @@
                 </a:solidFill>
                 <a:latin typeface="Helvetica Neue"/>
               </a:rPr>
-              <a:t>22 posts · 11,178 views</a:t>
+              <a:t>22 posts · 11,246 views</a:t>
             </a:r>
           </a:p>
         </p:txBody>
@@ -9436,7 +9436,7 @@
                 </a:solidFill>
                 <a:latin typeface="Georgia"/>
               </a:rPr>
-              <a:t>17,210 views</a:t>
+              <a:t>17,213 views</a:t>
             </a:r>
           </a:p>
         </p:txBody>
@@ -9674,7 +9674,7 @@
                 </a:solidFill>
                 <a:latin typeface="Helvetica Neue"/>
               </a:rPr>
-              <a:t>3 posts · 194 views</a:t>
+              <a:t>3 posts · 197 views</a:t>
             </a:r>
           </a:p>
         </p:txBody>
@@ -9830,7 +9830,7 @@
                 </a:solidFill>
                 <a:latin typeface="Georgia"/>
               </a:rPr>
-              <a:t>9,198 views</a:t>
+              <a:t>9,200 views</a:t>
             </a:r>
           </a:p>
         </p:txBody>
@@ -9864,7 +9864,7 @@
                 </a:solidFill>
                 <a:latin typeface="Helvetica Neue"/>
               </a:rPr>
-              <a:t>10 posts · 919 avg / post</a:t>
+              <a:t>10 posts · 920 avg / post</a:t>
             </a:r>
           </a:p>
         </p:txBody>
@@ -10068,7 +10068,7 @@
                 </a:solidFill>
                 <a:latin typeface="Helvetica Neue"/>
               </a:rPr>
-              <a:t>5 posts · 3,066 views</a:t>
+              <a:t>5 posts · 3,068 views</a:t>
             </a:r>
           </a:p>
         </p:txBody>
@@ -10224,7 +10224,7 @@
                 </a:solidFill>
                 <a:latin typeface="Georgia"/>
               </a:rPr>
-              <a:t>8,235 views</a:t>
+              <a:t>8,236 views</a:t>
             </a:r>
           </a:p>
         </p:txBody>
@@ -10462,7 +10462,7 @@
                 </a:solidFill>
                 <a:latin typeface="Helvetica Neue"/>
               </a:rPr>
-              <a:t>2 posts · 845 views</a:t>
+              <a:t>2 posts · 846 views</a:t>
             </a:r>
           </a:p>
         </p:txBody>
@@ -10816,7 +10816,7 @@
                 </a:solidFill>
                 <a:latin typeface="Georgia"/>
               </a:rPr>
-              <a:t>228,907</a:t>
+              <a:t>228,992</a:t>
             </a:r>
           </a:p>
         </p:txBody>
@@ -10884,7 +10884,7 @@
                 </a:solidFill>
                 <a:latin typeface="Helvetica Neue"/>
               </a:rPr>
-              <a:t>1,774 avg / post</a:t>
+              <a:t>1,775 avg / post</a:t>
             </a:r>
           </a:p>
         </p:txBody>
@@ -11074,7 +11074,7 @@
                 </a:solidFill>
                 <a:latin typeface="Georgia"/>
               </a:rPr>
-              <a:t>147,429</a:t>
+              <a:t>147,507</a:t>
             </a:r>
           </a:p>
         </p:txBody>
@@ -11332,7 +11332,7 @@
                 </a:solidFill>
                 <a:latin typeface="Georgia"/>
               </a:rPr>
-              <a:t>138,828</a:t>
+              <a:t>138,834</a:t>
             </a:r>
           </a:p>
         </p:txBody>
@@ -11590,7 +11590,7 @@
                 </a:solidFill>
                 <a:latin typeface="Georgia"/>
               </a:rPr>
-              <a:t>1,441</a:t>
+              <a:t>1,452</a:t>
             </a:r>
           </a:p>
         </p:txBody>
@@ -11658,7 +11658,7 @@
                 </a:solidFill>
                 <a:latin typeface="Helvetica Neue"/>
               </a:rPr>
-              <a:t>110 avg / post</a:t>
+              <a:t>111 avg / post</a:t>
             </a:r>
           </a:p>
         </p:txBody>

--- a/STATE_OF_THE_SHOW.pptx
+++ b/STATE_OF_THE_SHOW.pptx
@@ -3314,7 +3314,7 @@
                 </a:solidFill>
                 <a:latin typeface="Helvetica Neue"/>
               </a:rPr>
-              <a:t>Since Jun 8, 2026 · through 2026-09-11</a:t>
+              <a:t>Since Jun 8, 2026 · through 2026-09-14</a:t>
             </a:r>
           </a:p>
         </p:txBody>
@@ -3581,7 +3581,7 @@
                 </a:solidFill>
                 <a:latin typeface="Georgia"/>
               </a:rPr>
-              <a:t>516,785</a:t>
+              <a:t>517,128</a:t>
             </a:r>
           </a:p>
         </p:txBody>
@@ -3894,7 +3894,7 @@
                 </a:solidFill>
                 <a:latin typeface="Georgia"/>
               </a:rPr>
-              <a:t>16,555</a:t>
+              <a:t>16,560</a:t>
             </a:r>
           </a:p>
         </p:txBody>
@@ -4050,7 +4050,7 @@
                 </a:solidFill>
                 <a:latin typeface="Georgia"/>
               </a:rPr>
-              <a:t>927</a:t>
+              <a:t>928</a:t>
             </a:r>
           </a:p>
         </p:txBody>
@@ -4594,7 +4594,7 @@
                 </a:solidFill>
                 <a:latin typeface="Georgia"/>
               </a:rPr>
-              <a:t>220,319 views</a:t>
+              <a:t>220,327 views</a:t>
             </a:r>
           </a:p>
         </p:txBody>
@@ -4964,7 +4964,7 @@
                 </a:solidFill>
                 <a:latin typeface="Georgia"/>
               </a:rPr>
-              <a:t>207,768 views</a:t>
+              <a:t>207,770 views</a:t>
             </a:r>
           </a:p>
         </p:txBody>
@@ -5334,7 +5334,7 @@
                 </a:solidFill>
                 <a:latin typeface="Georgia"/>
               </a:rPr>
-              <a:t>88,698 views</a:t>
+              <a:t>89,031 views</a:t>
             </a:r>
           </a:p>
         </p:txBody>
@@ -5368,7 +5368,7 @@
                 </a:solidFill>
                 <a:latin typeface="Helvetica Neue"/>
               </a:rPr>
-              <a:t>141 posts · 629 avg / post</a:t>
+              <a:t>141 posts · 631 avg / post</a:t>
             </a:r>
           </a:p>
         </p:txBody>
@@ -9042,7 +9042,7 @@
                 </a:solidFill>
                 <a:latin typeface="Georgia"/>
               </a:rPr>
-              <a:t>18,374 views</a:t>
+              <a:t>18,571 views</a:t>
             </a:r>
           </a:p>
         </p:txBody>
@@ -9076,7 +9076,7 @@
                 </a:solidFill>
                 <a:latin typeface="Helvetica Neue"/>
               </a:rPr>
-              <a:t>46 posts · 399 avg / post</a:t>
+              <a:t>46 posts · 403 avg / post</a:t>
             </a:r>
           </a:p>
         </p:txBody>
@@ -9144,7 +9144,7 @@
                 </a:solidFill>
                 <a:latin typeface="Helvetica Neue"/>
               </a:rPr>
-              <a:t>1 posts · 147 views</a:t>
+              <a:t>1 posts · 150 views</a:t>
             </a:r>
           </a:p>
         </p:txBody>
@@ -9212,7 +9212,7 @@
                 </a:solidFill>
                 <a:latin typeface="Helvetica Neue"/>
               </a:rPr>
-              <a:t>23 posts · 6,981 views</a:t>
+              <a:t>23 posts · 6,982 views</a:t>
             </a:r>
           </a:p>
         </p:txBody>
@@ -9280,7 +9280,7 @@
                 </a:solidFill>
                 <a:latin typeface="Helvetica Neue"/>
               </a:rPr>
-              <a:t>22 posts · 11,246 views</a:t>
+              <a:t>22 posts · 11,439 views</a:t>
             </a:r>
           </a:p>
         </p:txBody>
@@ -9436,7 +9436,7 @@
                 </a:solidFill>
                 <a:latin typeface="Georgia"/>
               </a:rPr>
-              <a:t>17,213 views</a:t>
+              <a:t>17,218 views</a:t>
             </a:r>
           </a:p>
         </p:txBody>
@@ -9470,7 +9470,7 @@
                 </a:solidFill>
                 <a:latin typeface="Helvetica Neue"/>
               </a:rPr>
-              <a:t>16 posts · 1,075 avg / post</a:t>
+              <a:t>16 posts · 1,076 avg / post</a:t>
             </a:r>
           </a:p>
         </p:txBody>
@@ -9674,7 +9674,7 @@
                 </a:solidFill>
                 <a:latin typeface="Helvetica Neue"/>
               </a:rPr>
-              <a:t>3 posts · 197 views</a:t>
+              <a:t>3 posts · 202 views</a:t>
             </a:r>
           </a:p>
         </p:txBody>
@@ -9830,7 +9830,7 @@
                 </a:solidFill>
                 <a:latin typeface="Georgia"/>
               </a:rPr>
-              <a:t>9,200 views</a:t>
+              <a:t>9,219 views</a:t>
             </a:r>
           </a:p>
         </p:txBody>
@@ -9864,7 +9864,7 @@
                 </a:solidFill>
                 <a:latin typeface="Helvetica Neue"/>
               </a:rPr>
-              <a:t>10 posts · 920 avg / post</a:t>
+              <a:t>10 posts · 921 avg / post</a:t>
             </a:r>
           </a:p>
         </p:txBody>
@@ -10068,7 +10068,7 @@
                 </a:solidFill>
                 <a:latin typeface="Helvetica Neue"/>
               </a:rPr>
-              <a:t>5 posts · 3,068 views</a:t>
+              <a:t>5 posts · 3,087 views</a:t>
             </a:r>
           </a:p>
         </p:txBody>
@@ -10224,7 +10224,7 @@
                 </a:solidFill>
                 <a:latin typeface="Georgia"/>
               </a:rPr>
-              <a:t>8,236 views</a:t>
+              <a:t>8,249 views</a:t>
             </a:r>
           </a:p>
         </p:txBody>
@@ -10258,7 +10258,7 @@
                 </a:solidFill>
                 <a:latin typeface="Helvetica Neue"/>
               </a:rPr>
-              <a:t>8 posts · 1,029 avg / post</a:t>
+              <a:t>8 posts · 1,031 avg / post</a:t>
             </a:r>
           </a:p>
         </p:txBody>
@@ -10462,7 +10462,7 @@
                 </a:solidFill>
                 <a:latin typeface="Helvetica Neue"/>
               </a:rPr>
-              <a:t>2 posts · 846 views</a:t>
+              <a:t>2 posts · 859 views</a:t>
             </a:r>
           </a:p>
         </p:txBody>
@@ -10816,7 +10816,7 @@
                 </a:solidFill>
                 <a:latin typeface="Georgia"/>
               </a:rPr>
-              <a:t>228,992</a:t>
+              <a:t>229,039</a:t>
             </a:r>
           </a:p>
         </p:txBody>
@@ -11074,7 +11074,7 @@
                 </a:solidFill>
                 <a:latin typeface="Georgia"/>
               </a:rPr>
-              <a:t>147,507</a:t>
+              <a:t>147,716</a:t>
             </a:r>
           </a:p>
         </p:txBody>
@@ -11142,7 +11142,7 @@
                 </a:solidFill>
                 <a:latin typeface="Helvetica Neue"/>
               </a:rPr>
-              <a:t>1,053 avg / post</a:t>
+              <a:t>1,055 avg / post</a:t>
             </a:r>
           </a:p>
         </p:txBody>
@@ -11332,7 +11332,7 @@
                 </a:solidFill>
                 <a:latin typeface="Georgia"/>
               </a:rPr>
-              <a:t>138,834</a:t>
+              <a:t>138,895</a:t>
             </a:r>
           </a:p>
         </p:txBody>
@@ -11590,7 +11590,7 @@
                 </a:solidFill>
                 <a:latin typeface="Georgia"/>
               </a:rPr>
-              <a:t>1,452</a:t>
+              <a:t>1,478</a:t>
             </a:r>
           </a:p>
         </p:txBody>
@@ -11658,7 +11658,7 @@
                 </a:solidFill>
                 <a:latin typeface="Helvetica Neue"/>
               </a:rPr>
-              <a:t>111 avg / post</a:t>
+              <a:t>113 avg / post</a:t>
             </a:r>
           </a:p>
         </p:txBody>

--- a/STATE_OF_THE_SHOW.pptx
+++ b/STATE_OF_THE_SHOW.pptx
@@ -3314,7 +3314,7 @@
                 </a:solidFill>
                 <a:latin typeface="Helvetica Neue"/>
               </a:rPr>
-              <a:t>Since Jun 8, 2026 · through 2026-09-14</a:t>
+              <a:t>Since Jun 8, 2026 · through 2026-09-16</a:t>
             </a:r>
           </a:p>
         </p:txBody>
@@ -3581,7 +3581,7 @@
                 </a:solidFill>
                 <a:latin typeface="Georgia"/>
               </a:rPr>
-              <a:t>517,128</a:t>
+              <a:t>517,228</a:t>
             </a:r>
           </a:p>
         </p:txBody>
@@ -3894,7 +3894,7 @@
                 </a:solidFill>
                 <a:latin typeface="Georgia"/>
               </a:rPr>
-              <a:t>16,560</a:t>
+              <a:t>16,566</a:t>
             </a:r>
           </a:p>
         </p:txBody>
@@ -4206,7 +4206,7 @@
                 </a:solidFill>
                 <a:latin typeface="Georgia"/>
               </a:rPr>
-              <a:t>1,188</a:t>
+              <a:t>1,189</a:t>
             </a:r>
           </a:p>
         </p:txBody>
@@ -4594,7 +4594,7 @@
                 </a:solidFill>
                 <a:latin typeface="Georgia"/>
               </a:rPr>
-              <a:t>220,327 views</a:t>
+              <a:t>220,330 views</a:t>
             </a:r>
           </a:p>
         </p:txBody>
@@ -4964,7 +4964,7 @@
                 </a:solidFill>
                 <a:latin typeface="Georgia"/>
               </a:rPr>
-              <a:t>207,770 views</a:t>
+              <a:t>207,772 views</a:t>
             </a:r>
           </a:p>
         </p:txBody>
@@ -5334,7 +5334,7 @@
                 </a:solidFill>
                 <a:latin typeface="Georgia"/>
               </a:rPr>
-              <a:t>89,031 views</a:t>
+              <a:t>89,126 views</a:t>
             </a:r>
           </a:p>
         </p:txBody>
@@ -5368,7 +5368,7 @@
                 </a:solidFill>
                 <a:latin typeface="Helvetica Neue"/>
               </a:rPr>
-              <a:t>141 posts · 631 avg / post</a:t>
+              <a:t>141 posts · 632 avg / post</a:t>
             </a:r>
           </a:p>
         </p:txBody>
@@ -9042,7 +9042,7 @@
                 </a:solidFill>
                 <a:latin typeface="Georgia"/>
               </a:rPr>
-              <a:t>18,571 views</a:t>
+              <a:t>18,627 views</a:t>
             </a:r>
           </a:p>
         </p:txBody>
@@ -9076,7 +9076,7 @@
                 </a:solidFill>
                 <a:latin typeface="Helvetica Neue"/>
               </a:rPr>
-              <a:t>46 posts · 403 avg / post</a:t>
+              <a:t>46 posts · 404 avg / post</a:t>
             </a:r>
           </a:p>
         </p:txBody>
@@ -9144,7 +9144,7 @@
                 </a:solidFill>
                 <a:latin typeface="Helvetica Neue"/>
               </a:rPr>
-              <a:t>1 posts · 150 views</a:t>
+              <a:t>1 posts · 153 views</a:t>
             </a:r>
           </a:p>
         </p:txBody>
@@ -9212,7 +9212,7 @@
                 </a:solidFill>
                 <a:latin typeface="Helvetica Neue"/>
               </a:rPr>
-              <a:t>23 posts · 6,982 views</a:t>
+              <a:t>23 posts · 6,983 views</a:t>
             </a:r>
           </a:p>
         </p:txBody>
@@ -9280,7 +9280,7 @@
                 </a:solidFill>
                 <a:latin typeface="Helvetica Neue"/>
               </a:rPr>
-              <a:t>22 posts · 11,439 views</a:t>
+              <a:t>22 posts · 11,491 views</a:t>
             </a:r>
           </a:p>
         </p:txBody>
@@ -9436,7 +9436,7 @@
                 </a:solidFill>
                 <a:latin typeface="Georgia"/>
               </a:rPr>
-              <a:t>17,218 views</a:t>
+              <a:t>17,222 views</a:t>
             </a:r>
           </a:p>
         </p:txBody>
@@ -9674,7 +9674,7 @@
                 </a:solidFill>
                 <a:latin typeface="Helvetica Neue"/>
               </a:rPr>
-              <a:t>3 posts · 202 views</a:t>
+              <a:t>3 posts · 206 views</a:t>
             </a:r>
           </a:p>
         </p:txBody>
@@ -9830,7 +9830,7 @@
                 </a:solidFill>
                 <a:latin typeface="Georgia"/>
               </a:rPr>
-              <a:t>9,219 views</a:t>
+              <a:t>9,221 views</a:t>
             </a:r>
           </a:p>
         </p:txBody>
@@ -9864,7 +9864,7 @@
                 </a:solidFill>
                 <a:latin typeface="Helvetica Neue"/>
               </a:rPr>
-              <a:t>10 posts · 921 avg / post</a:t>
+              <a:t>10 posts · 922 avg / post</a:t>
             </a:r>
           </a:p>
         </p:txBody>
@@ -10068,7 +10068,7 @@
                 </a:solidFill>
                 <a:latin typeface="Helvetica Neue"/>
               </a:rPr>
-              <a:t>5 posts · 3,087 views</a:t>
+              <a:t>5 posts · 3,089 views</a:t>
             </a:r>
           </a:p>
         </p:txBody>
@@ -10816,7 +10816,7 @@
                 </a:solidFill>
                 <a:latin typeface="Georgia"/>
               </a:rPr>
-              <a:t>229,039</a:t>
+              <a:t>229,080</a:t>
             </a:r>
           </a:p>
         </p:txBody>
@@ -11074,7 +11074,7 @@
                 </a:solidFill>
                 <a:latin typeface="Georgia"/>
               </a:rPr>
-              <a:t>147,716</a:t>
+              <a:t>147,756</a:t>
             </a:r>
           </a:p>
         </p:txBody>
@@ -11332,7 +11332,7 @@
                 </a:solidFill>
                 <a:latin typeface="Georgia"/>
               </a:rPr>
-              <a:t>138,895</a:t>
+              <a:t>138,903</a:t>
             </a:r>
           </a:p>
         </p:txBody>
@@ -11590,7 +11590,7 @@
                 </a:solidFill>
                 <a:latin typeface="Georgia"/>
               </a:rPr>
-              <a:t>1,478</a:t>
+              <a:t>1,489</a:t>
             </a:r>
           </a:p>
         </p:txBody>
@@ -11658,7 +11658,7 @@
                 </a:solidFill>
                 <a:latin typeface="Helvetica Neue"/>
               </a:rPr>
-              <a:t>113 avg / post</a:t>
+              <a:t>114 avg / post</a:t>
             </a:r>
           </a:p>
         </p:txBody>

--- a/STATE_OF_THE_SHOW.pptx
+++ b/STATE_OF_THE_SHOW.pptx
@@ -3314,7 +3314,7 @@
                 </a:solidFill>
                 <a:latin typeface="Helvetica Neue"/>
               </a:rPr>
-              <a:t>Since Jun 8, 2026 · through 2026-09-16</a:t>
+              <a:t>Since Jun 8, 2026 · through 2026-09-18</a:t>
             </a:r>
           </a:p>
         </p:txBody>
@@ -3581,7 +3581,7 @@
                 </a:solidFill>
                 <a:latin typeface="Georgia"/>
               </a:rPr>
-              <a:t>517,228</a:t>
+              <a:t>517,253</a:t>
             </a:r>
           </a:p>
         </p:txBody>
@@ -4594,7 +4594,7 @@
                 </a:solidFill>
                 <a:latin typeface="Georgia"/>
               </a:rPr>
-              <a:t>220,330 views</a:t>
+              <a:t>220,333 views</a:t>
             </a:r>
           </a:p>
         </p:txBody>
@@ -4964,7 +4964,7 @@
                 </a:solidFill>
                 <a:latin typeface="Georgia"/>
               </a:rPr>
-              <a:t>207,772 views</a:t>
+              <a:t>207,773 views</a:t>
             </a:r>
           </a:p>
         </p:txBody>
@@ -5334,7 +5334,7 @@
                 </a:solidFill>
                 <a:latin typeface="Georgia"/>
               </a:rPr>
-              <a:t>89,126 views</a:t>
+              <a:t>89,147 views</a:t>
             </a:r>
           </a:p>
         </p:txBody>
@@ -9042,7 +9042,7 @@
                 </a:solidFill>
                 <a:latin typeface="Georgia"/>
               </a:rPr>
-              <a:t>18,627 views</a:t>
+              <a:t>18,635 views</a:t>
             </a:r>
           </a:p>
         </p:txBody>
@@ -9076,7 +9076,7 @@
                 </a:solidFill>
                 <a:latin typeface="Helvetica Neue"/>
               </a:rPr>
-              <a:t>46 posts · 404 avg / post</a:t>
+              <a:t>46 posts · 405 avg / post</a:t>
             </a:r>
           </a:p>
         </p:txBody>
@@ -9144,7 +9144,7 @@
                 </a:solidFill>
                 <a:latin typeface="Helvetica Neue"/>
               </a:rPr>
-              <a:t>1 posts · 153 views</a:t>
+              <a:t>1 posts · 156 views</a:t>
             </a:r>
           </a:p>
         </p:txBody>
@@ -9212,7 +9212,7 @@
                 </a:solidFill>
                 <a:latin typeface="Helvetica Neue"/>
               </a:rPr>
-              <a:t>23 posts · 6,983 views</a:t>
+              <a:t>23 posts · 6,984 views</a:t>
             </a:r>
           </a:p>
         </p:txBody>
@@ -9280,7 +9280,7 @@
                 </a:solidFill>
                 <a:latin typeface="Helvetica Neue"/>
               </a:rPr>
-              <a:t>22 posts · 11,491 views</a:t>
+              <a:t>22 posts · 11,495 views</a:t>
             </a:r>
           </a:p>
         </p:txBody>
@@ -9436,7 +9436,7 @@
                 </a:solidFill>
                 <a:latin typeface="Georgia"/>
               </a:rPr>
-              <a:t>17,222 views</a:t>
+              <a:t>17,225 views</a:t>
             </a:r>
           </a:p>
         </p:txBody>
@@ -9674,7 +9674,7 @@
                 </a:solidFill>
                 <a:latin typeface="Helvetica Neue"/>
               </a:rPr>
-              <a:t>3 posts · 206 views</a:t>
+              <a:t>3 posts · 209 views</a:t>
             </a:r>
           </a:p>
         </p:txBody>
@@ -9830,7 +9830,7 @@
                 </a:solidFill>
                 <a:latin typeface="Georgia"/>
               </a:rPr>
-              <a:t>9,221 views</a:t>
+              <a:t>9,222 views</a:t>
             </a:r>
           </a:p>
         </p:txBody>
@@ -10068,7 +10068,7 @@
                 </a:solidFill>
                 <a:latin typeface="Helvetica Neue"/>
               </a:rPr>
-              <a:t>5 posts · 3,089 views</a:t>
+              <a:t>5 posts · 3,090 views</a:t>
             </a:r>
           </a:p>
         </p:txBody>
@@ -10816,7 +10816,7 @@
                 </a:solidFill>
                 <a:latin typeface="Georgia"/>
               </a:rPr>
-              <a:t>229,080</a:t>
+              <a:t>229,095</a:t>
             </a:r>
           </a:p>
         </p:txBody>
@@ -11074,7 +11074,7 @@
                 </a:solidFill>
                 <a:latin typeface="Georgia"/>
               </a:rPr>
-              <a:t>147,756</a:t>
+              <a:t>147,758</a:t>
             </a:r>
           </a:p>
         </p:txBody>
@@ -11590,7 +11590,7 @@
                 </a:solidFill>
                 <a:latin typeface="Georgia"/>
               </a:rPr>
-              <a:t>1,489</a:t>
+              <a:t>1,497</a:t>
             </a:r>
           </a:p>
         </p:txBody>
@@ -11658,7 +11658,7 @@
                 </a:solidFill>
                 <a:latin typeface="Helvetica Neue"/>
               </a:rPr>
-              <a:t>114 avg / post</a:t>
+              <a:t>115 avg / post</a:t>
             </a:r>
           </a:p>
         </p:txBody>

--- a/STATE_OF_THE_SHOW.pptx
+++ b/STATE_OF_THE_SHOW.pptx
@@ -3314,7 +3314,7 @@
                 </a:solidFill>
                 <a:latin typeface="Helvetica Neue"/>
               </a:rPr>
-              <a:t>Since Jun 8, 2026 · through 2026-09-18</a:t>
+              <a:t>Since Jun 8, 2026 · through 2026-09-21</a:t>
             </a:r>
           </a:p>
         </p:txBody>
@@ -3581,7 +3581,7 @@
                 </a:solidFill>
                 <a:latin typeface="Georgia"/>
               </a:rPr>
-              <a:t>517,253</a:t>
+              <a:t>517,279</a:t>
             </a:r>
           </a:p>
         </p:txBody>
@@ -4594,7 +4594,7 @@
                 </a:solidFill>
                 <a:latin typeface="Georgia"/>
               </a:rPr>
-              <a:t>220,333 views</a:t>
+              <a:t>220,342 views</a:t>
             </a:r>
           </a:p>
         </p:txBody>
@@ -4628,7 +4628,7 @@
                 </a:solidFill>
                 <a:latin typeface="Helvetica Neue"/>
               </a:rPr>
-              <a:t>131 posts · 1,681 avg / post</a:t>
+              <a:t>131 posts · 1,682 avg / post</a:t>
             </a:r>
           </a:p>
         </p:txBody>
@@ -4964,7 +4964,7 @@
                 </a:solidFill>
                 <a:latin typeface="Georgia"/>
               </a:rPr>
-              <a:t>207,773 views</a:t>
+              <a:t>207,774 views</a:t>
             </a:r>
           </a:p>
         </p:txBody>
@@ -5334,7 +5334,7 @@
                 </a:solidFill>
                 <a:latin typeface="Georgia"/>
               </a:rPr>
-              <a:t>89,147 views</a:t>
+              <a:t>89,163 views</a:t>
             </a:r>
           </a:p>
         </p:txBody>
@@ -9042,7 +9042,7 @@
                 </a:solidFill>
                 <a:latin typeface="Georgia"/>
               </a:rPr>
-              <a:t>18,635 views</a:t>
+              <a:t>18,648 views</a:t>
             </a:r>
           </a:p>
         </p:txBody>
@@ -9144,7 +9144,7 @@
                 </a:solidFill>
                 <a:latin typeface="Helvetica Neue"/>
               </a:rPr>
-              <a:t>1 posts · 156 views</a:t>
+              <a:t>1 posts · 163 views</a:t>
             </a:r>
           </a:p>
         </p:txBody>
@@ -9280,7 +9280,7 @@
                 </a:solidFill>
                 <a:latin typeface="Helvetica Neue"/>
               </a:rPr>
-              <a:t>22 posts · 11,495 views</a:t>
+              <a:t>22 posts · 11,501 views</a:t>
             </a:r>
           </a:p>
         </p:txBody>
@@ -9436,7 +9436,7 @@
                 </a:solidFill>
                 <a:latin typeface="Georgia"/>
               </a:rPr>
-              <a:t>17,225 views</a:t>
+              <a:t>17,226 views</a:t>
             </a:r>
           </a:p>
         </p:txBody>
@@ -9674,7 +9674,7 @@
                 </a:solidFill>
                 <a:latin typeface="Helvetica Neue"/>
               </a:rPr>
-              <a:t>3 posts · 209 views</a:t>
+              <a:t>3 posts · 210 views</a:t>
             </a:r>
           </a:p>
         </p:txBody>
@@ -10224,7 +10224,7 @@
                 </a:solidFill>
                 <a:latin typeface="Georgia"/>
               </a:rPr>
-              <a:t>8,249 views</a:t>
+              <a:t>8,250 views</a:t>
             </a:r>
           </a:p>
         </p:txBody>
@@ -10394,7 +10394,7 @@
                 </a:solidFill>
                 <a:latin typeface="Helvetica Neue"/>
               </a:rPr>
-              <a:t>4 posts · 1,348 views</a:t>
+              <a:t>4 posts · 1,349 views</a:t>
             </a:r>
           </a:p>
         </p:txBody>
@@ -10816,7 +10816,7 @@
                 </a:solidFill>
                 <a:latin typeface="Georgia"/>
               </a:rPr>
-              <a:t>229,095</a:t>
+              <a:t>229,109</a:t>
             </a:r>
           </a:p>
         </p:txBody>
@@ -10884,7 +10884,7 @@
                 </a:solidFill>
                 <a:latin typeface="Helvetica Neue"/>
               </a:rPr>
-              <a:t>1,775 avg / post</a:t>
+              <a:t>1,776 avg / post</a:t>
             </a:r>
           </a:p>
         </p:txBody>
@@ -11590,7 +11590,7 @@
                 </a:solidFill>
                 <a:latin typeface="Georgia"/>
               </a:rPr>
-              <a:t>1,497</a:t>
+              <a:t>1,509</a:t>
             </a:r>
           </a:p>
         </p:txBody>
@@ -11658,7 +11658,7 @@
                 </a:solidFill>
                 <a:latin typeface="Helvetica Neue"/>
               </a:rPr>
-              <a:t>115 avg / post</a:t>
+              <a:t>116 avg / post</a:t>
             </a:r>
           </a:p>
         </p:txBody>

--- a/STATE_OF_THE_SHOW.pptx
+++ b/STATE_OF_THE_SHOW.pptx
@@ -3314,7 +3314,7 @@
                 </a:solidFill>
                 <a:latin typeface="Helvetica Neue"/>
               </a:rPr>
-              <a:t>Since Jun 8, 2026 · through 2026-09-21</a:t>
+              <a:t>Since Jun 8, 2026 · through 2026-09-23</a:t>
             </a:r>
           </a:p>
         </p:txBody>
@@ -3581,7 +3581,7 @@
                 </a:solidFill>
                 <a:latin typeface="Georgia"/>
               </a:rPr>
-              <a:t>517,279</a:t>
+              <a:t>517,291</a:t>
             </a:r>
           </a:p>
         </p:txBody>
@@ -4594,7 +4594,7 @@
                 </a:solidFill>
                 <a:latin typeface="Georgia"/>
               </a:rPr>
-              <a:t>220,342 views</a:t>
+              <a:t>220,344 views</a:t>
             </a:r>
           </a:p>
         </p:txBody>
@@ -4964,7 +4964,7 @@
                 </a:solidFill>
                 <a:latin typeface="Georgia"/>
               </a:rPr>
-              <a:t>207,774 views</a:t>
+              <a:t>207,775 views</a:t>
             </a:r>
           </a:p>
         </p:txBody>
@@ -5334,7 +5334,7 @@
                 </a:solidFill>
                 <a:latin typeface="Georgia"/>
               </a:rPr>
-              <a:t>89,163 views</a:t>
+              <a:t>89,172 views</a:t>
             </a:r>
           </a:p>
         </p:txBody>
@@ -9042,7 +9042,7 @@
                 </a:solidFill>
                 <a:latin typeface="Georgia"/>
               </a:rPr>
-              <a:t>18,648 views</a:t>
+              <a:t>18,653 views</a:t>
             </a:r>
           </a:p>
         </p:txBody>
@@ -9144,7 +9144,7 @@
                 </a:solidFill>
                 <a:latin typeface="Helvetica Neue"/>
               </a:rPr>
-              <a:t>1 posts · 163 views</a:t>
+              <a:t>1 posts · 165 views</a:t>
             </a:r>
           </a:p>
         </p:txBody>
@@ -9280,7 +9280,7 @@
                 </a:solidFill>
                 <a:latin typeface="Helvetica Neue"/>
               </a:rPr>
-              <a:t>22 posts · 11,501 views</a:t>
+              <a:t>22 posts · 11,504 views</a:t>
             </a:r>
           </a:p>
         </p:txBody>
@@ -9436,7 +9436,7 @@
                 </a:solidFill>
                 <a:latin typeface="Georgia"/>
               </a:rPr>
-              <a:t>17,226 views</a:t>
+              <a:t>17,227 views</a:t>
             </a:r>
           </a:p>
         </p:txBody>
@@ -9674,7 +9674,7 @@
                 </a:solidFill>
                 <a:latin typeface="Helvetica Neue"/>
               </a:rPr>
-              <a:t>3 posts · 210 views</a:t>
+              <a:t>3 posts · 211 views</a:t>
             </a:r>
           </a:p>
         </p:txBody>
@@ -10224,7 +10224,7 @@
                 </a:solidFill>
                 <a:latin typeface="Georgia"/>
               </a:rPr>
-              <a:t>8,250 views</a:t>
+              <a:t>8,251 views</a:t>
             </a:r>
           </a:p>
         </p:txBody>
@@ -10394,7 +10394,7 @@
                 </a:solidFill>
                 <a:latin typeface="Helvetica Neue"/>
               </a:rPr>
-              <a:t>4 posts · 1,349 views</a:t>
+              <a:t>4 posts · 1,350 views</a:t>
             </a:r>
           </a:p>
         </p:txBody>
@@ -10816,7 +10816,7 @@
                 </a:solidFill>
                 <a:latin typeface="Georgia"/>
               </a:rPr>
-              <a:t>229,109</a:t>
+              <a:t>229,114</a:t>
             </a:r>
           </a:p>
         </p:txBody>
@@ -11590,7 +11590,7 @@
                 </a:solidFill>
                 <a:latin typeface="Georgia"/>
               </a:rPr>
-              <a:t>1,509</a:t>
+              <a:t>1,516</a:t>
             </a:r>
           </a:p>
         </p:txBody>

--- a/STATE_OF_THE_SHOW.pptx
+++ b/STATE_OF_THE_SHOW.pptx
@@ -3314,7 +3314,7 @@
                 </a:solidFill>
                 <a:latin typeface="Helvetica Neue"/>
               </a:rPr>
-              <a:t>Since Jun 8, 2026 · through 2026-09-23</a:t>
+              <a:t>Since Jun 8, 2026 · through 2026-09-25</a:t>
             </a:r>
           </a:p>
         </p:txBody>
@@ -3581,7 +3581,7 @@
                 </a:solidFill>
                 <a:latin typeface="Georgia"/>
               </a:rPr>
-              <a:t>517,291</a:t>
+              <a:t>517,298</a:t>
             </a:r>
           </a:p>
         </p:txBody>
@@ -4594,7 +4594,7 @@
                 </a:solidFill>
                 <a:latin typeface="Georgia"/>
               </a:rPr>
-              <a:t>220,344 views</a:t>
+              <a:t>220,345 views</a:t>
             </a:r>
           </a:p>
         </p:txBody>
@@ -5334,7 +5334,7 @@
                 </a:solidFill>
                 <a:latin typeface="Georgia"/>
               </a:rPr>
-              <a:t>89,172 views</a:t>
+              <a:t>89,178 views</a:t>
             </a:r>
           </a:p>
         </p:txBody>
@@ -9042,7 +9042,7 @@
                 </a:solidFill>
                 <a:latin typeface="Georgia"/>
               </a:rPr>
-              <a:t>18,653 views</a:t>
+              <a:t>18,657 views</a:t>
             </a:r>
           </a:p>
         </p:txBody>
@@ -9144,7 +9144,7 @@
                 </a:solidFill>
                 <a:latin typeface="Helvetica Neue"/>
               </a:rPr>
-              <a:t>1 posts · 165 views</a:t>
+              <a:t>1 posts · 166 views</a:t>
             </a:r>
           </a:p>
         </p:txBody>
@@ -9280,7 +9280,7 @@
                 </a:solidFill>
                 <a:latin typeface="Helvetica Neue"/>
               </a:rPr>
-              <a:t>22 posts · 11,504 views</a:t>
+              <a:t>22 posts · 11,507 views</a:t>
             </a:r>
           </a:p>
         </p:txBody>
@@ -10816,7 +10816,7 @@
                 </a:solidFill>
                 <a:latin typeface="Georgia"/>
               </a:rPr>
-              <a:t>229,114</a:t>
+              <a:t>229,118</a:t>
             </a:r>
           </a:p>
         </p:txBody>
@@ -11590,7 +11590,7 @@
                 </a:solidFill>
                 <a:latin typeface="Georgia"/>
               </a:rPr>
-              <a:t>1,516</a:t>
+              <a:t>1,519</a:t>
             </a:r>
           </a:p>
         </p:txBody>

--- a/STATE_OF_THE_SHOW.pptx
+++ b/STATE_OF_THE_SHOW.pptx
@@ -3314,7 +3314,7 @@
                 </a:solidFill>
                 <a:latin typeface="Helvetica Neue"/>
               </a:rPr>
-              <a:t>Since Jun 8, 2026 · through 2026-09-25</a:t>
+              <a:t>Since Jun 8, 2026 · through 2026-09-28</a:t>
             </a:r>
           </a:p>
         </p:txBody>
@@ -3581,7 +3581,7 @@
                 </a:solidFill>
                 <a:latin typeface="Georgia"/>
               </a:rPr>
-              <a:t>517,298</a:t>
+              <a:t>517,310</a:t>
             </a:r>
           </a:p>
         </p:txBody>
@@ -4594,7 +4594,7 @@
                 </a:solidFill>
                 <a:latin typeface="Georgia"/>
               </a:rPr>
-              <a:t>220,345 views</a:t>
+              <a:t>220,351 views</a:t>
             </a:r>
           </a:p>
         </p:txBody>
@@ -5334,7 +5334,7 @@
                 </a:solidFill>
                 <a:latin typeface="Georgia"/>
               </a:rPr>
-              <a:t>89,178 views</a:t>
+              <a:t>89,184 views</a:t>
             </a:r>
           </a:p>
         </p:txBody>
@@ -9042,7 +9042,7 @@
                 </a:solidFill>
                 <a:latin typeface="Georgia"/>
               </a:rPr>
-              <a:t>18,657 views</a:t>
+              <a:t>18,663 views</a:t>
             </a:r>
           </a:p>
         </p:txBody>
@@ -9144,7 +9144,7 @@
                 </a:solidFill>
                 <a:latin typeface="Helvetica Neue"/>
               </a:rPr>
-              <a:t>1 posts · 166 views</a:t>
+              <a:t>1 posts · 169 views</a:t>
             </a:r>
           </a:p>
         </p:txBody>
@@ -9280,7 +9280,7 @@
                 </a:solidFill>
                 <a:latin typeface="Helvetica Neue"/>
               </a:rPr>
-              <a:t>22 posts · 11,507 views</a:t>
+              <a:t>22 posts · 11,510 views</a:t>
             </a:r>
           </a:p>
         </p:txBody>
@@ -9436,7 +9436,7 @@
                 </a:solidFill>
                 <a:latin typeface="Georgia"/>
               </a:rPr>
-              <a:t>17,227 views</a:t>
+              <a:t>17,229 views</a:t>
             </a:r>
           </a:p>
         </p:txBody>
@@ -9674,7 +9674,7 @@
                 </a:solidFill>
                 <a:latin typeface="Helvetica Neue"/>
               </a:rPr>
-              <a:t>3 posts · 211 views</a:t>
+              <a:t>3 posts · 213 views</a:t>
             </a:r>
           </a:p>
         </p:txBody>
@@ -10816,7 +10816,7 @@
                 </a:solidFill>
                 <a:latin typeface="Georgia"/>
               </a:rPr>
-              <a:t>229,118</a:t>
+              <a:t>229,121</a:t>
             </a:r>
           </a:p>
         </p:txBody>
@@ -11590,7 +11590,7 @@
                 </a:solidFill>
                 <a:latin typeface="Georgia"/>
               </a:rPr>
-              <a:t>1,519</a:t>
+              <a:t>1,528</a:t>
             </a:r>
           </a:p>
         </p:txBody>
@@ -11658,7 +11658,7 @@
                 </a:solidFill>
                 <a:latin typeface="Helvetica Neue"/>
               </a:rPr>
-              <a:t>116 avg / post</a:t>
+              <a:t>117 avg / post</a:t>
             </a:r>
           </a:p>
         </p:txBody>

--- a/STATE_OF_THE_SHOW.pptx
+++ b/STATE_OF_THE_SHOW.pptx
@@ -3314,7 +3314,7 @@
                 </a:solidFill>
                 <a:latin typeface="Helvetica Neue"/>
               </a:rPr>
-              <a:t>Since Jun 8, 2026 · through 2026-09-28</a:t>
+              <a:t>Since Jun 8, 2026 · through 2026-10-02</a:t>
             </a:r>
           </a:p>
         </p:txBody>
@@ -3581,7 +3581,7 @@
                 </a:solidFill>
                 <a:latin typeface="Georgia"/>
               </a:rPr>
-              <a:t>517,310</a:t>
+              <a:t>517,363</a:t>
             </a:r>
           </a:p>
         </p:txBody>
@@ -4594,7 +4594,7 @@
                 </a:solidFill>
                 <a:latin typeface="Georgia"/>
               </a:rPr>
-              <a:t>220,351 views</a:t>
+              <a:t>220,354 views</a:t>
             </a:r>
           </a:p>
         </p:txBody>
@@ -4964,7 +4964,7 @@
                 </a:solidFill>
                 <a:latin typeface="Georgia"/>
               </a:rPr>
-              <a:t>207,775 views</a:t>
+              <a:t>207,781 views</a:t>
             </a:r>
           </a:p>
         </p:txBody>
@@ -5334,7 +5334,7 @@
                 </a:solidFill>
                 <a:latin typeface="Georgia"/>
               </a:rPr>
-              <a:t>89,184 views</a:t>
+              <a:t>89,228 views</a:t>
             </a:r>
           </a:p>
         </p:txBody>
@@ -9042,7 +9042,7 @@
                 </a:solidFill>
                 <a:latin typeface="Georgia"/>
               </a:rPr>
-              <a:t>18,663 views</a:t>
+              <a:t>18,672 views</a:t>
             </a:r>
           </a:p>
         </p:txBody>
@@ -9144,7 +9144,7 @@
                 </a:solidFill>
                 <a:latin typeface="Helvetica Neue"/>
               </a:rPr>
-              <a:t>1 posts · 169 views</a:t>
+              <a:t>1 posts · 170 views</a:t>
             </a:r>
           </a:p>
         </p:txBody>
@@ -9212,7 +9212,7 @@
                 </a:solidFill>
                 <a:latin typeface="Helvetica Neue"/>
               </a:rPr>
-              <a:t>23 posts · 6,984 views</a:t>
+              <a:t>23 posts · 6,987 views</a:t>
             </a:r>
           </a:p>
         </p:txBody>
@@ -9280,7 +9280,7 @@
                 </a:solidFill>
                 <a:latin typeface="Helvetica Neue"/>
               </a:rPr>
-              <a:t>22 posts · 11,510 views</a:t>
+              <a:t>22 posts · 11,515 views</a:t>
             </a:r>
           </a:p>
         </p:txBody>
@@ -10224,7 +10224,7 @@
                 </a:solidFill>
                 <a:latin typeface="Georgia"/>
               </a:rPr>
-              <a:t>8,251 views</a:t>
+              <a:t>8,253 views</a:t>
             </a:r>
           </a:p>
         </p:txBody>
@@ -10394,7 +10394,7 @@
                 </a:solidFill>
                 <a:latin typeface="Helvetica Neue"/>
               </a:rPr>
-              <a:t>4 posts · 1,350 views</a:t>
+              <a:t>4 posts · 1,352 views</a:t>
             </a:r>
           </a:p>
         </p:txBody>
@@ -10816,7 +10816,7 @@
                 </a:solidFill>
                 <a:latin typeface="Georgia"/>
               </a:rPr>
-              <a:t>229,121</a:t>
+              <a:t>229,160</a:t>
             </a:r>
           </a:p>
         </p:txBody>
@@ -11590,7 +11590,7 @@
                 </a:solidFill>
                 <a:latin typeface="Georgia"/>
               </a:rPr>
-              <a:t>1,528</a:t>
+              <a:t>1,542</a:t>
             </a:r>
           </a:p>
         </p:txBody>
@@ -11658,7 +11658,7 @@
                 </a:solidFill>
                 <a:latin typeface="Helvetica Neue"/>
               </a:rPr>
-              <a:t>117 avg / post</a:t>
+              <a:t>118 avg / post</a:t>
             </a:r>
           </a:p>
         </p:txBody>

--- a/STATE_OF_THE_SHOW.pptx
+++ b/STATE_OF_THE_SHOW.pptx
@@ -3314,7 +3314,7 @@
                 </a:solidFill>
                 <a:latin typeface="Helvetica Neue"/>
               </a:rPr>
-              <a:t>Since Jun 8, 2026 · through 2026-10-02</a:t>
+              <a:t>Since Jun 8, 2026 · through 2026-10-09</a:t>
             </a:r>
           </a:p>
         </p:txBody>
@@ -3581,7 +3581,7 @@
                 </a:solidFill>
                 <a:latin typeface="Georgia"/>
               </a:rPr>
-              <a:t>517,363</a:t>
+              <a:t>517,518</a:t>
             </a:r>
           </a:p>
         </p:txBody>
@@ -4050,7 +4050,7 @@
                 </a:solidFill>
                 <a:latin typeface="Georgia"/>
               </a:rPr>
-              <a:t>928</a:t>
+              <a:t>929</a:t>
             </a:r>
           </a:p>
         </p:txBody>
@@ -4594,7 +4594,7 @@
                 </a:solidFill>
                 <a:latin typeface="Georgia"/>
               </a:rPr>
-              <a:t>220,354 views</a:t>
+              <a:t>220,366 views</a:t>
             </a:r>
           </a:p>
         </p:txBody>
@@ -4964,7 +4964,7 @@
                 </a:solidFill>
                 <a:latin typeface="Georgia"/>
               </a:rPr>
-              <a:t>207,781 views</a:t>
+              <a:t>207,811 views</a:t>
             </a:r>
           </a:p>
         </p:txBody>
@@ -5334,7 +5334,7 @@
                 </a:solidFill>
                 <a:latin typeface="Georgia"/>
               </a:rPr>
-              <a:t>89,228 views</a:t>
+              <a:t>89,341 views</a:t>
             </a:r>
           </a:p>
         </p:txBody>
@@ -5368,7 +5368,7 @@
                 </a:solidFill>
                 <a:latin typeface="Helvetica Neue"/>
               </a:rPr>
-              <a:t>141 posts · 632 avg / post</a:t>
+              <a:t>141 posts · 633 avg / post</a:t>
             </a:r>
           </a:p>
         </p:txBody>
@@ -9042,7 +9042,7 @@
                 </a:solidFill>
                 <a:latin typeface="Georgia"/>
               </a:rPr>
-              <a:t>18,672 views</a:t>
+              <a:t>18,770 views</a:t>
             </a:r>
           </a:p>
         </p:txBody>
@@ -9076,7 +9076,7 @@
                 </a:solidFill>
                 <a:latin typeface="Helvetica Neue"/>
               </a:rPr>
-              <a:t>46 posts · 405 avg / post</a:t>
+              <a:t>46 posts · 408 avg / post</a:t>
             </a:r>
           </a:p>
         </p:txBody>
@@ -9144,7 +9144,7 @@
                 </a:solidFill>
                 <a:latin typeface="Helvetica Neue"/>
               </a:rPr>
-              <a:t>1 posts · 170 views</a:t>
+              <a:t>1 posts · 179 views</a:t>
             </a:r>
           </a:p>
         </p:txBody>
@@ -9212,7 +9212,7 @@
                 </a:solidFill>
                 <a:latin typeface="Helvetica Neue"/>
               </a:rPr>
-              <a:t>23 posts · 6,987 views</a:t>
+              <a:t>23 posts · 7,015 views</a:t>
             </a:r>
           </a:p>
         </p:txBody>
@@ -9280,7 +9280,7 @@
                 </a:solidFill>
                 <a:latin typeface="Helvetica Neue"/>
               </a:rPr>
-              <a:t>22 posts · 11,515 views</a:t>
+              <a:t>22 posts · 11,576 views</a:t>
             </a:r>
           </a:p>
         </p:txBody>
@@ -9436,7 +9436,7 @@
                 </a:solidFill>
                 <a:latin typeface="Georgia"/>
               </a:rPr>
-              <a:t>17,229 views</a:t>
+              <a:t>17,231 views</a:t>
             </a:r>
           </a:p>
         </p:txBody>
@@ -9674,7 +9674,7 @@
                 </a:solidFill>
                 <a:latin typeface="Helvetica Neue"/>
               </a:rPr>
-              <a:t>3 posts · 213 views</a:t>
+              <a:t>3 posts · 215 views</a:t>
             </a:r>
           </a:p>
         </p:txBody>
@@ -10224,7 +10224,7 @@
                 </a:solidFill>
                 <a:latin typeface="Georgia"/>
               </a:rPr>
-              <a:t>8,253 views</a:t>
+              <a:t>8,255 views</a:t>
             </a:r>
           </a:p>
         </p:txBody>
@@ -10394,7 +10394,7 @@
                 </a:solidFill>
                 <a:latin typeface="Helvetica Neue"/>
               </a:rPr>
-              <a:t>4 posts · 1,352 views</a:t>
+              <a:t>4 posts · 1,354 views</a:t>
             </a:r>
           </a:p>
         </p:txBody>
@@ -10816,7 +10816,7 @@
                 </a:solidFill>
                 <a:latin typeface="Georgia"/>
               </a:rPr>
-              <a:t>229,160</a:t>
+              <a:t>229,210</a:t>
             </a:r>
           </a:p>
         </p:txBody>
@@ -11590,7 +11590,7 @@
                 </a:solidFill>
                 <a:latin typeface="Georgia"/>
               </a:rPr>
-              <a:t>1,542</a:t>
+              <a:t>1,647</a:t>
             </a:r>
           </a:p>
         </p:txBody>
@@ -11658,7 +11658,7 @@
                 </a:solidFill>
                 <a:latin typeface="Helvetica Neue"/>
               </a:rPr>
-              <a:t>118 avg / post</a:t>
+              <a:t>126 avg / post</a:t>
             </a:r>
           </a:p>
         </p:txBody>

--- a/STATE_OF_THE_SHOW.pptx
+++ b/STATE_OF_THE_SHOW.pptx
@@ -3314,7 +3314,7 @@
                 </a:solidFill>
                 <a:latin typeface="Helvetica Neue"/>
               </a:rPr>
-              <a:t>Since Jun 8, 2026 · through 2026-10-09</a:t>
+              <a:t>Since Jun 8, 2026 · through 2026-10-14</a:t>
             </a:r>
           </a:p>
         </p:txBody>
@@ -3581,7 +3581,7 @@
                 </a:solidFill>
                 <a:latin typeface="Georgia"/>
               </a:rPr>
-              <a:t>517,518</a:t>
+              <a:t>517,613</a:t>
             </a:r>
           </a:p>
         </p:txBody>
@@ -4594,7 +4594,7 @@
                 </a:solidFill>
                 <a:latin typeface="Georgia"/>
               </a:rPr>
-              <a:t>220,366 views</a:t>
+              <a:t>220,376 views</a:t>
             </a:r>
           </a:p>
         </p:txBody>
@@ -4964,7 +4964,7 @@
                 </a:solidFill>
                 <a:latin typeface="Georgia"/>
               </a:rPr>
-              <a:t>207,811 views</a:t>
+              <a:t>207,823 views</a:t>
             </a:r>
           </a:p>
         </p:txBody>
@@ -5334,7 +5334,7 @@
                 </a:solidFill>
                 <a:latin typeface="Georgia"/>
               </a:rPr>
-              <a:t>89,341 views</a:t>
+              <a:t>89,414 views</a:t>
             </a:r>
           </a:p>
         </p:txBody>
@@ -5368,7 +5368,7 @@
                 </a:solidFill>
                 <a:latin typeface="Helvetica Neue"/>
               </a:rPr>
-              <a:t>141 posts · 633 avg / post</a:t>
+              <a:t>141 posts · 634 avg / post</a:t>
             </a:r>
           </a:p>
         </p:txBody>
@@ -9042,7 +9042,7 @@
                 </a:solidFill>
                 <a:latin typeface="Georgia"/>
               </a:rPr>
-              <a:t>18,770 views</a:t>
+              <a:t>18,827 views</a:t>
             </a:r>
           </a:p>
         </p:txBody>
@@ -9076,7 +9076,7 @@
                 </a:solidFill>
                 <a:latin typeface="Helvetica Neue"/>
               </a:rPr>
-              <a:t>46 posts · 408 avg / post</a:t>
+              <a:t>46 posts · 409 avg / post</a:t>
             </a:r>
           </a:p>
         </p:txBody>
@@ -9144,7 +9144,7 @@
                 </a:solidFill>
                 <a:latin typeface="Helvetica Neue"/>
               </a:rPr>
-              <a:t>1 posts · 179 views</a:t>
+              <a:t>1 posts · 186 views</a:t>
             </a:r>
           </a:p>
         </p:txBody>
@@ -9212,7 +9212,7 @@
                 </a:solidFill>
                 <a:latin typeface="Helvetica Neue"/>
               </a:rPr>
-              <a:t>23 posts · 7,015 views</a:t>
+              <a:t>23 posts · 7,026 views</a:t>
             </a:r>
           </a:p>
         </p:txBody>
@@ -9280,7 +9280,7 @@
                 </a:solidFill>
                 <a:latin typeface="Helvetica Neue"/>
               </a:rPr>
-              <a:t>22 posts · 11,576 views</a:t>
+              <a:t>22 posts · 11,615 views</a:t>
             </a:r>
           </a:p>
         </p:txBody>
@@ -9436,7 +9436,7 @@
                 </a:solidFill>
                 <a:latin typeface="Georgia"/>
               </a:rPr>
-              <a:t>17,231 views</a:t>
+              <a:t>17,232 views</a:t>
             </a:r>
           </a:p>
         </p:txBody>
@@ -9470,7 +9470,7 @@
                 </a:solidFill>
                 <a:latin typeface="Helvetica Neue"/>
               </a:rPr>
-              <a:t>16 posts · 1,076 avg / post</a:t>
+              <a:t>16 posts · 1,077 avg / post</a:t>
             </a:r>
           </a:p>
         </p:txBody>
@@ -9674,7 +9674,7 @@
                 </a:solidFill>
                 <a:latin typeface="Helvetica Neue"/>
               </a:rPr>
-              <a:t>3 posts · 215 views</a:t>
+              <a:t>3 posts · 216 views</a:t>
             </a:r>
           </a:p>
         </p:txBody>
@@ -10816,7 +10816,7 @@
                 </a:solidFill>
                 <a:latin typeface="Georgia"/>
               </a:rPr>
-              <a:t>229,210</a:t>
+              <a:t>229,243</a:t>
             </a:r>
           </a:p>
         </p:txBody>
@@ -10884,7 +10884,7 @@
                 </a:solidFill>
                 <a:latin typeface="Helvetica Neue"/>
               </a:rPr>
-              <a:t>1,776 avg / post</a:t>
+              <a:t>1,777 avg / post</a:t>
             </a:r>
           </a:p>
         </p:txBody>
@@ -11590,7 +11590,7 @@
                 </a:solidFill>
                 <a:latin typeface="Georgia"/>
               </a:rPr>
-              <a:t>1,647</a:t>
+              <a:t>1,709</a:t>
             </a:r>
           </a:p>
         </p:txBody>
@@ -11658,7 +11658,7 @@
                 </a:solidFill>
                 <a:latin typeface="Helvetica Neue"/>
               </a:rPr>
-              <a:t>126 avg / post</a:t>
+              <a:t>131 avg / post</a:t>
             </a:r>
           </a:p>
         </p:txBody>

--- a/STATE_OF_THE_SHOW.pptx
+++ b/STATE_OF_THE_SHOW.pptx
@@ -3314,7 +3314,7 @@
                 </a:solidFill>
                 <a:latin typeface="Helvetica Neue"/>
               </a:rPr>
-              <a:t>Since Jun 8, 2026 · through 2026-10-14</a:t>
+              <a:t>Since Jun 8, 2026 · through 2026-10-16</a:t>
             </a:r>
           </a:p>
         </p:txBody>
@@ -3581,7 +3581,7 @@
                 </a:solidFill>
                 <a:latin typeface="Georgia"/>
               </a:rPr>
-              <a:t>517,613</a:t>
+              <a:t>517,638</a:t>
             </a:r>
           </a:p>
         </p:txBody>
@@ -4594,7 +4594,7 @@
                 </a:solidFill>
                 <a:latin typeface="Georgia"/>
               </a:rPr>
-              <a:t>220,376 views</a:t>
+              <a:t>220,385 views</a:t>
             </a:r>
           </a:p>
         </p:txBody>
@@ -4964,7 +4964,7 @@
                 </a:solidFill>
                 <a:latin typeface="Georgia"/>
               </a:rPr>
-              <a:t>207,823 views</a:t>
+              <a:t>207,824 views</a:t>
             </a:r>
           </a:p>
         </p:txBody>
@@ -5334,7 +5334,7 @@
                 </a:solidFill>
                 <a:latin typeface="Georgia"/>
               </a:rPr>
-              <a:t>89,414 views</a:t>
+              <a:t>89,429 views</a:t>
             </a:r>
           </a:p>
         </p:txBody>
@@ -9042,7 +9042,7 @@
                 </a:solidFill>
                 <a:latin typeface="Georgia"/>
               </a:rPr>
-              <a:t>18,827 views</a:t>
+              <a:t>18,842 views</a:t>
             </a:r>
           </a:p>
         </p:txBody>
@@ -9144,7 +9144,7 @@
                 </a:solidFill>
                 <a:latin typeface="Helvetica Neue"/>
               </a:rPr>
-              <a:t>1 posts · 186 views</a:t>
+              <a:t>1 posts · 194 views</a:t>
             </a:r>
           </a:p>
         </p:txBody>
@@ -9212,7 +9212,7 @@
                 </a:solidFill>
                 <a:latin typeface="Helvetica Neue"/>
               </a:rPr>
-              <a:t>23 posts · 7,026 views</a:t>
+              <a:t>23 posts · 7,027 views</a:t>
             </a:r>
           </a:p>
         </p:txBody>
@@ -9280,7 +9280,7 @@
                 </a:solidFill>
                 <a:latin typeface="Helvetica Neue"/>
               </a:rPr>
-              <a:t>22 posts · 11,615 views</a:t>
+              <a:t>22 posts · 11,621 views</a:t>
             </a:r>
           </a:p>
         </p:txBody>
@@ -9436,7 +9436,7 @@
                 </a:solidFill>
                 <a:latin typeface="Georgia"/>
               </a:rPr>
-              <a:t>17,232 views</a:t>
+              <a:t>17,233 views</a:t>
             </a:r>
           </a:p>
         </p:txBody>
@@ -9674,7 +9674,7 @@
                 </a:solidFill>
                 <a:latin typeface="Helvetica Neue"/>
               </a:rPr>
-              <a:t>3 posts · 216 views</a:t>
+              <a:t>3 posts · 217 views</a:t>
             </a:r>
           </a:p>
         </p:txBody>
@@ -10816,7 +10816,7 @@
                 </a:solidFill>
                 <a:latin typeface="Georgia"/>
               </a:rPr>
-              <a:t>229,243</a:t>
+              <a:t>229,251</a:t>
             </a:r>
           </a:p>
         </p:txBody>
@@ -11590,7 +11590,7 @@
                 </a:solidFill>
                 <a:latin typeface="Georgia"/>
               </a:rPr>
-              <a:t>1,709</a:t>
+              <a:t>1,726</a:t>
             </a:r>
           </a:p>
         </p:txBody>
@@ -11658,7 +11658,7 @@
                 </a:solidFill>
                 <a:latin typeface="Helvetica Neue"/>
               </a:rPr>
-              <a:t>131 avg / post</a:t>
+              <a:t>132 avg / post</a:t>
             </a:r>
           </a:p>
         </p:txBody>

--- a/STATE_OF_THE_SHOW.pptx
+++ b/STATE_OF_THE_SHOW.pptx
@@ -3314,7 +3314,7 @@
                 </a:solidFill>
                 <a:latin typeface="Helvetica Neue"/>
               </a:rPr>
-              <a:t>Since Jun 8, 2026 · through 2026-10-16</a:t>
+              <a:t>Since Jun 8, 2026 · through 2026-10-23</a:t>
             </a:r>
           </a:p>
         </p:txBody>
@@ -3581,7 +3581,7 @@
                 </a:solidFill>
                 <a:latin typeface="Georgia"/>
               </a:rPr>
-              <a:t>517,638</a:t>
+              <a:t>517,811</a:t>
             </a:r>
           </a:p>
         </p:txBody>
@@ -3894,7 +3894,7 @@
                 </a:solidFill>
                 <a:latin typeface="Georgia"/>
               </a:rPr>
-              <a:t>16,566</a:t>
+              <a:t>16,568</a:t>
             </a:r>
           </a:p>
         </p:txBody>
@@ -4050,7 +4050,7 @@
                 </a:solidFill>
                 <a:latin typeface="Georgia"/>
               </a:rPr>
-              <a:t>929</a:t>
+              <a:t>932</a:t>
             </a:r>
           </a:p>
         </p:txBody>
@@ -4206,7 +4206,7 @@
                 </a:solidFill>
                 <a:latin typeface="Georgia"/>
               </a:rPr>
-              <a:t>1,189</a:t>
+              <a:t>1,190</a:t>
             </a:r>
           </a:p>
         </p:txBody>
@@ -4594,7 +4594,7 @@
                 </a:solidFill>
                 <a:latin typeface="Georgia"/>
               </a:rPr>
-              <a:t>220,385 views</a:t>
+              <a:t>220,402 views</a:t>
             </a:r>
           </a:p>
         </p:txBody>
@@ -4964,7 +4964,7 @@
                 </a:solidFill>
                 <a:latin typeface="Georgia"/>
               </a:rPr>
-              <a:t>207,824 views</a:t>
+              <a:t>207,858 views</a:t>
             </a:r>
           </a:p>
         </p:txBody>
@@ -4998,7 +4998,7 @@
                 </a:solidFill>
                 <a:latin typeface="Helvetica Neue"/>
               </a:rPr>
-              <a:t>163 posts · 1,274 avg / post</a:t>
+              <a:t>163 posts · 1,275 avg / post</a:t>
             </a:r>
           </a:p>
         </p:txBody>
@@ -5334,7 +5334,7 @@
                 </a:solidFill>
                 <a:latin typeface="Georgia"/>
               </a:rPr>
-              <a:t>89,429 views</a:t>
+              <a:t>89,551 views</a:t>
             </a:r>
           </a:p>
         </p:txBody>
@@ -5368,7 +5368,7 @@
                 </a:solidFill>
                 <a:latin typeface="Helvetica Neue"/>
               </a:rPr>
-              <a:t>141 posts · 634 avg / post</a:t>
+              <a:t>141 posts · 635 avg / post</a:t>
             </a:r>
           </a:p>
         </p:txBody>
@@ -9042,7 +9042,7 @@
                 </a:solidFill>
                 <a:latin typeface="Georgia"/>
               </a:rPr>
-              <a:t>18,842 views</a:t>
+              <a:t>18,961 views</a:t>
             </a:r>
           </a:p>
         </p:txBody>
@@ -9076,7 +9076,7 @@
                 </a:solidFill>
                 <a:latin typeface="Helvetica Neue"/>
               </a:rPr>
-              <a:t>46 posts · 409 avg / post</a:t>
+              <a:t>46 posts · 412 avg / post</a:t>
             </a:r>
           </a:p>
         </p:txBody>
@@ -9144,7 +9144,7 @@
                 </a:solidFill>
                 <a:latin typeface="Helvetica Neue"/>
               </a:rPr>
-              <a:t>1 posts · 194 views</a:t>
+              <a:t>1 posts · 206 views</a:t>
             </a:r>
           </a:p>
         </p:txBody>
@@ -9212,7 +9212,7 @@
                 </a:solidFill>
                 <a:latin typeface="Helvetica Neue"/>
               </a:rPr>
-              <a:t>23 posts · 7,027 views</a:t>
+              <a:t>23 posts · 7,058 views</a:t>
             </a:r>
           </a:p>
         </p:txBody>
@@ -9280,7 +9280,7 @@
                 </a:solidFill>
                 <a:latin typeface="Helvetica Neue"/>
               </a:rPr>
-              <a:t>22 posts · 11,621 views</a:t>
+              <a:t>22 posts · 11,697 views</a:t>
             </a:r>
           </a:p>
         </p:txBody>
@@ -9436,7 +9436,7 @@
                 </a:solidFill>
                 <a:latin typeface="Georgia"/>
               </a:rPr>
-              <a:t>17,233 views</a:t>
+              <a:t>17,239 views</a:t>
             </a:r>
           </a:p>
         </p:txBody>
@@ -9674,7 +9674,7 @@
                 </a:solidFill>
                 <a:latin typeface="Helvetica Neue"/>
               </a:rPr>
-              <a:t>3 posts · 217 views</a:t>
+              <a:t>3 posts · 223 views</a:t>
             </a:r>
           </a:p>
         </p:txBody>
@@ -10224,7 +10224,7 @@
                 </a:solidFill>
                 <a:latin typeface="Georgia"/>
               </a:rPr>
-              <a:t>8,255 views</a:t>
+              <a:t>8,258 views</a:t>
             </a:r>
           </a:p>
         </p:txBody>
@@ -10258,7 +10258,7 @@
                 </a:solidFill>
                 <a:latin typeface="Helvetica Neue"/>
               </a:rPr>
-              <a:t>8 posts · 1,031 avg / post</a:t>
+              <a:t>8 posts · 1,032 avg / post</a:t>
             </a:r>
           </a:p>
         </p:txBody>
@@ -10394,7 +10394,7 @@
                 </a:solidFill>
                 <a:latin typeface="Helvetica Neue"/>
               </a:rPr>
-              <a:t>4 posts · 1,354 views</a:t>
+              <a:t>4 posts · 1,357 views</a:t>
             </a:r>
           </a:p>
         </p:txBody>
@@ -10816,7 +10816,7 @@
                 </a:solidFill>
                 <a:latin typeface="Georgia"/>
               </a:rPr>
-              <a:t>229,251</a:t>
+              <a:t>229,291</a:t>
             </a:r>
           </a:p>
         </p:txBody>
@@ -11590,7 +11590,7 @@
                 </a:solidFill>
                 <a:latin typeface="Georgia"/>
               </a:rPr>
-              <a:t>1,726</a:t>
+              <a:t>1,859</a:t>
             </a:r>
           </a:p>
         </p:txBody>
@@ -11658,7 +11658,7 @@
                 </a:solidFill>
                 <a:latin typeface="Helvetica Neue"/>
               </a:rPr>
-              <a:t>132 avg / post</a:t>
+              <a:t>143 avg / post</a:t>
             </a:r>
           </a:p>
         </p:txBody>

--- a/STATE_OF_THE_SHOW.pptx
+++ b/STATE_OF_THE_SHOW.pptx
@@ -8254,7 +8254,7 @@
                 </a:solidFill>
                 <a:latin typeface="Georgia"/>
               </a:rPr>
-              <a:t>92,798 views</a:t>
+              <a:t>94,756 views</a:t>
             </a:r>
           </a:p>
         </p:txBody>
@@ -8288,7 +8288,7 @@
                 </a:solidFill>
                 <a:latin typeface="Helvetica Neue"/>
               </a:rPr>
-              <a:t>60 posts · 1,546 avg / post</a:t>
+              <a:t>62 posts · 1,528 avg / post</a:t>
             </a:r>
           </a:p>
         </p:txBody>
@@ -8492,7 +8492,7 @@
                 </a:solidFill>
                 <a:latin typeface="Helvetica Neue"/>
               </a:rPr>
-              <a:t>16 posts · 18,220 views</a:t>
+              <a:t>18 posts · 20,178 views</a:t>
             </a:r>
           </a:p>
         </p:txBody>
@@ -9042,7 +9042,7 @@
                 </a:solidFill>
                 <a:latin typeface="Georgia"/>
               </a:rPr>
-              <a:t>18,961 views</a:t>
+              <a:t>26,121 views</a:t>
             </a:r>
           </a:p>
         </p:txBody>
@@ -9076,7 +9076,7 @@
                 </a:solidFill>
                 <a:latin typeface="Helvetica Neue"/>
               </a:rPr>
-              <a:t>46 posts · 412 avg / post</a:t>
+              <a:t>67 posts · 389 avg / post</a:t>
             </a:r>
           </a:p>
         </p:txBody>
@@ -9144,7 +9144,7 @@
                 </a:solidFill>
                 <a:latin typeface="Helvetica Neue"/>
               </a:rPr>
-              <a:t>1 posts · 206 views</a:t>
+              <a:t>2 posts · 530 views</a:t>
             </a:r>
           </a:p>
         </p:txBody>
@@ -9212,7 +9212,7 @@
                 </a:solidFill>
                 <a:latin typeface="Helvetica Neue"/>
               </a:rPr>
-              <a:t>23 posts · 7,058 views</a:t>
+              <a:t>27 posts · 7,875 views</a:t>
             </a:r>
           </a:p>
         </p:txBody>
@@ -9280,7 +9280,7 @@
                 </a:solidFill>
                 <a:latin typeface="Helvetica Neue"/>
               </a:rPr>
-              <a:t>22 posts · 11,697 views</a:t>
+              <a:t>38 posts · 17,716 views</a:t>
             </a:r>
           </a:p>
         </p:txBody>
@@ -9738,7 +9738,7 @@
             <a:avLst/>
           </a:prstGeom>
           <a:solidFill>
-            <a:srgbClr val="6B7082"/>
+            <a:srgbClr val="2F3C7E"/>
           </a:solidFill>
           <a:ln>
             <a:noFill/>
@@ -9792,11 +9792,11 @@
             <a:r>
               <a:rPr sz="1000" b="1">
                 <a:solidFill>
-                  <a:srgbClr val="6B7082"/>
-                </a:solidFill>
-                <a:latin typeface="Helvetica Neue"/>
-              </a:rPr>
-              <a:t>ELECTIONS</a:t>
+                  <a:srgbClr val="2F3C7E"/>
+                </a:solidFill>
+                <a:latin typeface="Helvetica Neue"/>
+              </a:rPr>
+              <a:t>CITY HALL &amp; CIVIC</a:t>
             </a:r>
           </a:p>
         </p:txBody>
@@ -9830,7 +9830,7 @@
                 </a:solidFill>
                 <a:latin typeface="Georgia"/>
               </a:rPr>
-              <a:t>9,222 views</a:t>
+              <a:t>13,226 views</a:t>
             </a:r>
           </a:p>
         </p:txBody>
@@ -9864,7 +9864,7 @@
                 </a:solidFill>
                 <a:latin typeface="Helvetica Neue"/>
               </a:rPr>
-              <a:t>10 posts · 922 avg / post</a:t>
+              <a:t>19 posts · 696 avg / post</a:t>
             </a:r>
           </a:p>
         </p:txBody>
@@ -9932,7 +9932,7 @@
                 </a:solidFill>
                 <a:latin typeface="Helvetica Neue"/>
               </a:rPr>
-              <a:t>2 posts · 2,515 views</a:t>
+              <a:t>4 posts · 3,130 views</a:t>
             </a:r>
           </a:p>
         </p:txBody>
@@ -10000,7 +10000,7 @@
                 </a:solidFill>
                 <a:latin typeface="Helvetica Neue"/>
               </a:rPr>
-              <a:t>3 posts · 3,617 views</a:t>
+              <a:t>2 posts · 1,727 views</a:t>
             </a:r>
           </a:p>
         </p:txBody>
@@ -10068,7 +10068,7 @@
                 </a:solidFill>
                 <a:latin typeface="Helvetica Neue"/>
               </a:rPr>
-              <a:t>5 posts · 3,090 views</a:t>
+              <a:t>13 posts · 8,369 views</a:t>
             </a:r>
           </a:p>
         </p:txBody>
@@ -10224,7 +10224,7 @@
                 </a:solidFill>
                 <a:latin typeface="Georgia"/>
               </a:rPr>
-              <a:t>8,258 views</a:t>
+              <a:t>10,760 views</a:t>
             </a:r>
           </a:p>
         </p:txBody>
@@ -10258,7 +10258,7 @@
                 </a:solidFill>
                 <a:latin typeface="Helvetica Neue"/>
               </a:rPr>
-              <a:t>8 posts · 1,032 avg / post</a:t>
+              <a:t>12 posts · 896 avg / post</a:t>
             </a:r>
           </a:p>
         </p:txBody>
@@ -10326,7 +10326,7 @@
                 </a:solidFill>
                 <a:latin typeface="Helvetica Neue"/>
               </a:rPr>
-              <a:t>2 posts · 6,042 views</a:t>
+              <a:t>3 posts · 6,042 views</a:t>
             </a:r>
           </a:p>
         </p:txBody>
@@ -10394,7 +10394,7 @@
                 </a:solidFill>
                 <a:latin typeface="Helvetica Neue"/>
               </a:rPr>
-              <a:t>4 posts · 1,357 views</a:t>
+              <a:t>7 posts · 3,859 views</a:t>
             </a:r>
           </a:p>
         </p:txBody>
@@ -12202,7 +12202,7 @@
                 </a:solidFill>
                 <a:latin typeface="Helvetica Neue"/>
               </a:rPr>
-              <a:t>44% of the catalog is positive / community-forward content. Sponsors are buying breadth, not controversy.</a:t>
+              <a:t>48% of the catalog is positive / community-forward content. Sponsors are buying breadth, not controversy.</a:t>
             </a:r>
           </a:p>
         </p:txBody>

--- a/STATE_OF_THE_SHOW.pptx
+++ b/STATE_OF_THE_SHOW.pptx
@@ -3314,7 +3314,7 @@
                 </a:solidFill>
                 <a:latin typeface="Helvetica Neue"/>
               </a:rPr>
-              <a:t>Since Jun 8, 2026 · through 2026-10-23</a:t>
+              <a:t>Since Jun 8, 2026 · through 2026-10-30</a:t>
             </a:r>
           </a:p>
         </p:txBody>
@@ -3581,7 +3581,7 @@
                 </a:solidFill>
                 <a:latin typeface="Georgia"/>
               </a:rPr>
-              <a:t>517,811</a:t>
+              <a:t>517,967</a:t>
             </a:r>
           </a:p>
         </p:txBody>
@@ -3894,7 +3894,7 @@
                 </a:solidFill>
                 <a:latin typeface="Georgia"/>
               </a:rPr>
-              <a:t>16,568</a:t>
+              <a:t>16,570</a:t>
             </a:r>
           </a:p>
         </p:txBody>
@@ -4594,7 +4594,7 @@
                 </a:solidFill>
                 <a:latin typeface="Georgia"/>
               </a:rPr>
-              <a:t>220,402 views</a:t>
+              <a:t>220,415 views</a:t>
             </a:r>
           </a:p>
         </p:txBody>
@@ -4964,7 +4964,7 @@
                 </a:solidFill>
                 <a:latin typeface="Georgia"/>
               </a:rPr>
-              <a:t>207,858 views</a:t>
+              <a:t>207,904 views</a:t>
             </a:r>
           </a:p>
         </p:txBody>
@@ -5334,7 +5334,7 @@
                 </a:solidFill>
                 <a:latin typeface="Georgia"/>
               </a:rPr>
-              <a:t>89,551 views</a:t>
+              <a:t>89,648 views</a:t>
             </a:r>
           </a:p>
         </p:txBody>
@@ -9042,7 +9042,7 @@
                 </a:solidFill>
                 <a:latin typeface="Georgia"/>
               </a:rPr>
-              <a:t>26,121 views</a:t>
+              <a:t>26,272 views</a:t>
             </a:r>
           </a:p>
         </p:txBody>
@@ -9076,7 +9076,7 @@
                 </a:solidFill>
                 <a:latin typeface="Helvetica Neue"/>
               </a:rPr>
-              <a:t>67 posts · 389 avg / post</a:t>
+              <a:t>67 posts · 392 avg / post</a:t>
             </a:r>
           </a:p>
         </p:txBody>
@@ -9144,7 +9144,7 @@
                 </a:solidFill>
                 <a:latin typeface="Helvetica Neue"/>
               </a:rPr>
-              <a:t>2 posts · 530 views</a:t>
+              <a:t>2 posts · 540 views</a:t>
             </a:r>
           </a:p>
         </p:txBody>
@@ -9212,7 +9212,7 @@
                 </a:solidFill>
                 <a:latin typeface="Helvetica Neue"/>
               </a:rPr>
-              <a:t>27 posts · 7,875 views</a:t>
+              <a:t>27 posts · 7,919 views</a:t>
             </a:r>
           </a:p>
         </p:txBody>
@@ -9280,7 +9280,7 @@
                 </a:solidFill>
                 <a:latin typeface="Helvetica Neue"/>
               </a:rPr>
-              <a:t>38 posts · 17,716 views</a:t>
+              <a:t>38 posts · 17,813 views</a:t>
             </a:r>
           </a:p>
         </p:txBody>
@@ -11590,7 +11590,7 @@
                 </a:solidFill>
                 <a:latin typeface="Georgia"/>
               </a:rPr>
-              <a:t>1,859</a:t>
+              <a:t>2,015</a:t>
             </a:r>
           </a:p>
         </p:txBody>
@@ -11658,7 +11658,7 @@
                 </a:solidFill>
                 <a:latin typeface="Helvetica Neue"/>
               </a:rPr>
-              <a:t>143 avg / post</a:t>
+              <a:t>155 avg / post</a:t>
             </a:r>
           </a:p>
         </p:txBody>
